--- a/Session 10/Session_10_Object_Detection_YOLO.pptx
+++ b/Session 10/Session_10_Object_Detection_YOLO.pptx
@@ -2189,8 +2189,8 @@
         </p:blipFill>
         <p:spPr>
           <a:xfrm>
-            <a:off x="5029200" y="365760"/>
-            <a:ext cx="3840480" cy="2880360"/>
+            <a:off x="5638800" y="722376"/>
+            <a:ext cx="3230880" cy="2423160"/>
           </a:xfrm>
           <a:prstGeom prst="rect">
             <a:avLst/>
@@ -2205,8 +2205,8 @@
         </p:nvSpPr>
         <p:spPr>
           <a:xfrm>
-            <a:off x="5029200" y="3246120"/>
-            <a:ext cx="3840480" cy="54864"/>
+            <a:off x="5638798" y="3145536"/>
+            <a:ext cx="3230881" cy="54864"/>
           </a:xfrm>
           <a:prstGeom prst="rect">
             <a:avLst/>
@@ -2216,82 +2216,15 @@
           </a:solidFill>
           <a:ln/>
         </p:spPr>
-      </p:sp>
-      <p:sp>
-        <p:nvSpPr>
-          <p:cNvPr id="11" name="Text 8"/>
-          <p:cNvSpPr/>
-          <p:nvPr/>
-        </p:nvSpPr>
-        <p:spPr>
-          <a:xfrm>
-            <a:off x="5212080" y="3566160"/>
-            <a:ext cx="1828800" cy="228600"/>
-          </a:xfrm>
-          <a:prstGeom prst="rect">
-            <a:avLst/>
-          </a:prstGeom>
-          <a:noFill/>
-          <a:ln/>
-        </p:spPr>
-        <p:txBody>
-          <a:bodyPr wrap="square" lIns="0" tIns="0" rIns="0" bIns="0" rtlCol="0" anchor="ctr"/>
-          <a:lstStyle/>
-          <a:p>
-            <a:pPr marL="0" indent="0">
-              <a:buNone/>
-            </a:pPr>
-            <a:r>
-              <a:rPr lang="en-US" sz="900" b="1" kern="0" spc="200" dirty="0">
-                <a:solidFill>
-                  <a:srgbClr val="94A3B8"/>
-                </a:solidFill>
-                <a:latin typeface="Arial" pitchFamily="34" charset="0"/>
-                <a:ea typeface="Arial" pitchFamily="34" charset="-122"/>
-                <a:cs typeface="Arial" pitchFamily="34" charset="-120"/>
-              </a:rPr>
-              <a:t>TOPICS</a:t>
-            </a:r>
-            <a:endParaRPr lang="en-US" sz="900" dirty="0"/>
-          </a:p>
-        </p:txBody>
-      </p:sp>
-      <p:sp>
-        <p:nvSpPr>
-          <p:cNvPr id="12" name="Text 9"/>
-          <p:cNvSpPr/>
-          <p:nvPr/>
-        </p:nvSpPr>
-        <p:spPr>
-          <a:xfrm>
-            <a:off x="5212080" y="3794760"/>
-            <a:ext cx="1828800" cy="274320"/>
-          </a:xfrm>
-          <a:prstGeom prst="rect">
-            <a:avLst/>
-          </a:prstGeom>
-          <a:noFill/>
-          <a:ln/>
-        </p:spPr>
-        <p:txBody>
-          <a:bodyPr wrap="square" lIns="0" tIns="0" rIns="0" bIns="0" rtlCol="0" anchor="ctr"/>
-          <a:lstStyle/>
-          <a:p>
-            <a:pPr marL="0" indent="0">
-              <a:buNone/>
-            </a:pPr>
-            <a:r>
-              <a:rPr lang="en-US" sz="1200" dirty="0">
-                <a:solidFill>
-                  <a:srgbClr val="FFFFFF"/>
-                </a:solidFill>
-                <a:latin typeface="Calibri" pitchFamily="34" charset="0"/>
-                <a:ea typeface="Calibri" pitchFamily="34" charset="-122"/>
-                <a:cs typeface="Calibri" pitchFamily="34" charset="-120"/>
-              </a:rPr>
-              <a:t>2 Sessions Combined</a:t>
-            </a:r>
-            <a:endParaRPr lang="en-US" sz="1200" dirty="0"/>
+        <p:txBody>
+          <a:bodyPr/>
+          <a:lstStyle/>
+          <a:p>
+            <a:r>
+              <a:rPr lang="en-US" dirty="0"/>
+              <a:t> </a:t>
+            </a:r>
+            <a:endParaRPr lang="en-PK" dirty="0"/>
           </a:p>
         </p:txBody>
       </p:sp>
@@ -5903,7 +5836,7 @@
         </p:nvGraphicFramePr>
         <p:xfrm>
           <a:off x="457200" y="1097280"/>
-          <a:ext cx="8229600" cy="2743200"/>
+          <a:ext cx="8229600" cy="2468880"/>
         </p:xfrm>
         <a:graphic>
           <a:graphicData uri="http://schemas.openxmlformats.org/drawingml/2006/table">
